--- a/Riesgo de crédito - TP2/tp2_riesgo_credito_gs.pptx
+++ b/Riesgo de crédito - TP2/tp2_riesgo_credito_gs.pptx
@@ -2056,6 +2056,10 @@
             <a:prstDash val="solid"/>
           </a:ln>
         </p:spPr>
+        <p:txBody>
+          <a:bodyPr/>
+          <a:p/>
+        </p:txBody>
       </p:sp>
       <p:sp>
         <p:nvSpPr>
@@ -2081,6 +2085,10 @@
             <a:prstDash val="solid"/>
           </a:ln>
         </p:spPr>
+        <p:txBody>
+          <a:bodyPr/>
+          <a:p/>
+        </p:txBody>
       </p:sp>
       <p:sp>
         <p:nvSpPr>
@@ -2199,6 +2207,10 @@
             <a:prstDash val="solid"/>
           </a:ln>
         </p:spPr>
+        <p:txBody>
+          <a:bodyPr/>
+          <a:p/>
+        </p:txBody>
       </p:sp>
       <p:sp>
         <p:nvSpPr>
@@ -2264,15 +2276,13 @@
               <a:buNone/>
             </a:pPr>
             <a:r>
-              <a:rPr lang="en-US" sz="950" i="1" dirty="0">
+              <a:rPr sz="950">
                 <a:solidFill>
                   <a:srgbClr val="6B7280"/>
                 </a:solidFill>
-                <a:latin typeface="Calibri" pitchFamily="34" charset="0"/>
-                <a:ea typeface="Calibri" pitchFamily="34" charset="-122"/>
-                <a:cs typeface="Calibri" pitchFamily="34" charset="-120"/>
-              </a:rPr>
-              <a:t>Prof. Dr. Hans Hofmann  ·  Universität Hamburg  ·  1994</a:t>
+                <a:latin typeface="Calibri"/>
+              </a:rPr>
+              <a:t>Ignacio Aracena y Tomas Arizu</a:t>
             </a:r>
             <a:endParaRPr lang="en-US" sz="950" dirty="0"/>
           </a:p>
@@ -2300,6 +2310,10 @@
             <a:prstDash val="solid"/>
           </a:ln>
         </p:spPr>
+        <p:txBody>
+          <a:bodyPr/>
+          <a:p/>
+        </p:txBody>
       </p:sp>
       <p:sp>
         <p:nvSpPr>
@@ -3176,6 +3190,10 @@
             <a:prstDash val="solid"/>
           </a:ln>
         </p:spPr>
+        <p:txBody>
+          <a:bodyPr/>
+          <a:p/>
+        </p:txBody>
       </p:sp>
       <p:sp>
         <p:nvSpPr>
@@ -3277,6 +3295,10 @@
             <a:prstDash val="solid"/>
           </a:ln>
         </p:spPr>
+        <p:txBody>
+          <a:bodyPr/>
+          <a:p/>
+        </p:txBody>
       </p:sp>
       <p:sp>
         <p:nvSpPr>
@@ -3339,6 +3361,10 @@
             <a:prstDash val="solid"/>
           </a:ln>
         </p:spPr>
+        <p:txBody>
+          <a:bodyPr/>
+          <a:p/>
+        </p:txBody>
       </p:sp>
       <p:sp>
         <p:nvSpPr>
@@ -3557,6 +3583,10 @@
             <a:prstDash val="solid"/>
           </a:ln>
         </p:spPr>
+        <p:txBody>
+          <a:bodyPr/>
+          <a:p/>
+        </p:txBody>
       </p:sp>
       <p:sp>
         <p:nvSpPr>
@@ -3582,6 +3612,10 @@
             <a:prstDash val="solid"/>
           </a:ln>
         </p:spPr>
+        <p:txBody>
+          <a:bodyPr/>
+          <a:p/>
+        </p:txBody>
       </p:sp>
       <p:sp>
         <p:nvSpPr>
@@ -3919,6 +3953,10 @@
             <a:prstDash val="solid"/>
           </a:ln>
         </p:spPr>
+        <p:txBody>
+          <a:bodyPr/>
+          <a:p/>
+        </p:txBody>
       </p:sp>
       <p:sp>
         <p:nvSpPr>
@@ -4256,6 +4294,10 @@
             <a:prstDash val="solid"/>
           </a:ln>
         </p:spPr>
+        <p:txBody>
+          <a:bodyPr/>
+          <a:p/>
+        </p:txBody>
       </p:sp>
       <p:sp>
         <p:nvSpPr>
@@ -4593,6 +4635,10 @@
             <a:prstDash val="solid"/>
           </a:ln>
         </p:spPr>
+        <p:txBody>
+          <a:bodyPr/>
+          <a:p/>
+        </p:txBody>
       </p:sp>
       <p:sp>
         <p:nvSpPr>
@@ -4930,6 +4976,10 @@
             <a:prstDash val="solid"/>
           </a:ln>
         </p:spPr>
+        <p:txBody>
+          <a:bodyPr/>
+          <a:p/>
+        </p:txBody>
       </p:sp>
       <p:sp>
         <p:nvSpPr>
@@ -5265,6 +5315,10 @@
             <a:prstDash val="solid"/>
           </a:ln>
         </p:spPr>
+        <p:txBody>
+          <a:bodyPr/>
+          <a:p/>
+        </p:txBody>
       </p:sp>
       <p:sp>
         <p:nvSpPr>
@@ -5400,6 +5454,10 @@
             <a:prstDash val="solid"/>
           </a:ln>
         </p:spPr>
+        <p:txBody>
+          <a:bodyPr/>
+          <a:p/>
+        </p:txBody>
       </p:sp>
       <p:sp>
         <p:nvSpPr>
@@ -5501,6 +5559,10 @@
             <a:prstDash val="solid"/>
           </a:ln>
         </p:spPr>
+        <p:txBody>
+          <a:bodyPr/>
+          <a:p/>
+        </p:txBody>
       </p:sp>
       <p:sp>
         <p:nvSpPr>
@@ -5563,6 +5625,10 @@
             <a:prstDash val="solid"/>
           </a:ln>
         </p:spPr>
+        <p:txBody>
+          <a:bodyPr/>
+          <a:p/>
+        </p:txBody>
       </p:sp>
       <p:sp>
         <p:nvSpPr>
@@ -5703,6 +5769,10 @@
             <a:prstDash val="solid"/>
           </a:ln>
         </p:spPr>
+        <p:txBody>
+          <a:bodyPr/>
+          <a:p/>
+        </p:txBody>
       </p:sp>
       <p:sp>
         <p:nvSpPr>
@@ -5843,6 +5913,10 @@
             <a:prstDash val="solid"/>
           </a:ln>
         </p:spPr>
+        <p:txBody>
+          <a:bodyPr/>
+          <a:p/>
+        </p:txBody>
       </p:sp>
       <p:sp>
         <p:nvSpPr>
@@ -5944,6 +6018,10 @@
             <a:prstDash val="solid"/>
           </a:ln>
         </p:spPr>
+        <p:txBody>
+          <a:bodyPr/>
+          <a:p/>
+        </p:txBody>
       </p:sp>
       <p:sp>
         <p:nvSpPr>
@@ -6045,6 +6123,10 @@
             <a:prstDash val="solid"/>
           </a:ln>
         </p:spPr>
+        <p:txBody>
+          <a:bodyPr/>
+          <a:p/>
+        </p:txBody>
       </p:sp>
       <p:sp>
         <p:nvSpPr>
@@ -6224,6 +6306,10 @@
             <a:prstDash val="solid"/>
           </a:ln>
         </p:spPr>
+        <p:txBody>
+          <a:bodyPr/>
+          <a:p/>
+        </p:txBody>
       </p:sp>
       <p:sp>
         <p:nvSpPr>
@@ -6520,6 +6606,10 @@
             <a:prstDash val="solid"/>
           </a:ln>
         </p:spPr>
+        <p:txBody>
+          <a:bodyPr/>
+          <a:p/>
+        </p:txBody>
       </p:sp>
       <p:sp>
         <p:nvSpPr>
@@ -6582,6 +6672,10 @@
             <a:prstDash val="solid"/>
           </a:ln>
         </p:spPr>
+        <p:txBody>
+          <a:bodyPr/>
+          <a:p/>
+        </p:txBody>
       </p:sp>
       <p:sp>
         <p:nvSpPr>
@@ -6607,6 +6701,10 @@
             <a:prstDash val="solid"/>
           </a:ln>
         </p:spPr>
+        <p:txBody>
+          <a:bodyPr/>
+          <a:p/>
+        </p:txBody>
       </p:sp>
       <p:sp>
         <p:nvSpPr>
@@ -6632,6 +6730,10 @@
             <a:prstDash val="solid"/>
           </a:ln>
         </p:spPr>
+        <p:txBody>
+          <a:bodyPr/>
+          <a:p/>
+        </p:txBody>
       </p:sp>
       <p:sp>
         <p:nvSpPr>
@@ -6655,6 +6757,10 @@
             <a:prstDash val="solid"/>
           </a:ln>
         </p:spPr>
+        <p:txBody>
+          <a:bodyPr/>
+          <a:p/>
+        </p:txBody>
       </p:sp>
       <p:sp>
         <p:nvSpPr>
@@ -7029,6 +7135,10 @@
             <a:prstDash val="solid"/>
           </a:ln>
         </p:spPr>
+        <p:txBody>
+          <a:bodyPr/>
+          <a:p/>
+        </p:txBody>
       </p:sp>
       <p:sp>
         <p:nvSpPr>
@@ -7164,6 +7274,10 @@
             <a:prstDash val="solid"/>
           </a:ln>
         </p:spPr>
+        <p:txBody>
+          <a:bodyPr/>
+          <a:p/>
+        </p:txBody>
       </p:sp>
       <p:sp>
         <p:nvSpPr>
@@ -7265,6 +7379,10 @@
             <a:prstDash val="solid"/>
           </a:ln>
         </p:spPr>
+        <p:txBody>
+          <a:bodyPr/>
+          <a:p/>
+        </p:txBody>
       </p:sp>
       <p:sp>
         <p:nvSpPr>
@@ -7288,6 +7406,10 @@
             <a:prstDash val="solid"/>
           </a:ln>
         </p:spPr>
+        <p:txBody>
+          <a:bodyPr/>
+          <a:p/>
+        </p:txBody>
       </p:sp>
       <p:sp>
         <p:nvSpPr>
@@ -7389,6 +7511,10 @@
             <a:prstDash val="solid"/>
           </a:ln>
         </p:spPr>
+        <p:txBody>
+          <a:bodyPr/>
+          <a:p/>
+        </p:txBody>
       </p:sp>
       <p:sp>
         <p:nvSpPr>
@@ -7414,6 +7540,10 @@
             <a:prstDash val="solid"/>
           </a:ln>
         </p:spPr>
+        <p:txBody>
+          <a:bodyPr/>
+          <a:p/>
+        </p:txBody>
       </p:sp>
       <p:sp>
         <p:nvSpPr>
@@ -7673,6 +7803,10 @@
             <a:prstDash val="solid"/>
           </a:ln>
         </p:spPr>
+        <p:txBody>
+          <a:bodyPr/>
+          <a:p/>
+        </p:txBody>
       </p:sp>
       <p:sp>
         <p:nvSpPr>
@@ -7932,6 +8066,10 @@
             <a:prstDash val="solid"/>
           </a:ln>
         </p:spPr>
+        <p:txBody>
+          <a:bodyPr/>
+          <a:p/>
+        </p:txBody>
       </p:sp>
       <p:sp>
         <p:nvSpPr>
@@ -8191,6 +8329,10 @@
             <a:prstDash val="solid"/>
           </a:ln>
         </p:spPr>
+        <p:txBody>
+          <a:bodyPr/>
+          <a:p/>
+        </p:txBody>
       </p:sp>
       <p:sp>
         <p:nvSpPr>
@@ -8404,6 +8546,10 @@
             <a:prstDash val="solid"/>
           </a:ln>
         </p:spPr>
+        <p:txBody>
+          <a:bodyPr/>
+          <a:p/>
+        </p:txBody>
       </p:sp>
       <p:sp>
         <p:nvSpPr>
@@ -8505,6 +8651,10 @@
             <a:prstDash val="solid"/>
           </a:ln>
         </p:spPr>
+        <p:txBody>
+          <a:bodyPr/>
+          <a:p/>
+        </p:txBody>
       </p:sp>
       <p:sp>
         <p:nvSpPr>
@@ -8530,6 +8680,10 @@
             <a:prstDash val="solid"/>
           </a:ln>
         </p:spPr>
+        <p:txBody>
+          <a:bodyPr/>
+          <a:p/>
+        </p:txBody>
       </p:sp>
       <p:sp>
         <p:nvSpPr>
@@ -8631,6 +8785,10 @@
             <a:prstDash val="solid"/>
           </a:ln>
         </p:spPr>
+        <p:txBody>
+          <a:bodyPr/>
+          <a:p/>
+        </p:txBody>
       </p:sp>
       <p:sp>
         <p:nvSpPr>
@@ -8656,6 +8814,10 @@
             <a:prstDash val="solid"/>
           </a:ln>
         </p:spPr>
+        <p:txBody>
+          <a:bodyPr/>
+          <a:p/>
+        </p:txBody>
       </p:sp>
       <p:sp>
         <p:nvSpPr>
@@ -8757,6 +8919,10 @@
             <a:prstDash val="solid"/>
           </a:ln>
         </p:spPr>
+        <p:txBody>
+          <a:bodyPr/>
+          <a:p/>
+        </p:txBody>
       </p:sp>
       <p:sp>
         <p:nvSpPr>
@@ -8782,6 +8948,10 @@
             <a:prstDash val="solid"/>
           </a:ln>
         </p:spPr>
+        <p:txBody>
+          <a:bodyPr/>
+          <a:p/>
+        </p:txBody>
       </p:sp>
       <p:sp>
         <p:nvSpPr>
@@ -8883,6 +9053,10 @@
             <a:prstDash val="solid"/>
           </a:ln>
         </p:spPr>
+        <p:txBody>
+          <a:bodyPr/>
+          <a:p/>
+        </p:txBody>
       </p:sp>
       <p:sp>
         <p:nvSpPr>
@@ -8908,6 +9082,10 @@
             <a:prstDash val="solid"/>
           </a:ln>
         </p:spPr>
+        <p:txBody>
+          <a:bodyPr/>
+          <a:p/>
+        </p:txBody>
       </p:sp>
       <p:sp>
         <p:nvSpPr>
@@ -9009,6 +9187,10 @@
             <a:prstDash val="solid"/>
           </a:ln>
         </p:spPr>
+        <p:txBody>
+          <a:bodyPr/>
+          <a:p/>
+        </p:txBody>
       </p:sp>
       <p:sp>
         <p:nvSpPr>
@@ -9034,6 +9216,10 @@
             <a:prstDash val="solid"/>
           </a:ln>
         </p:spPr>
+        <p:txBody>
+          <a:bodyPr/>
+          <a:p/>
+        </p:txBody>
       </p:sp>
       <p:sp>
         <p:nvSpPr>
@@ -9137,6 +9323,10 @@
             <a:prstDash val="solid"/>
           </a:ln>
         </p:spPr>
+        <p:txBody>
+          <a:bodyPr/>
+          <a:p/>
+        </p:txBody>
       </p:sp>
       <p:sp>
         <p:nvSpPr>
@@ -9311,6 +9501,10 @@
             <a:prstDash val="solid"/>
           </a:ln>
         </p:spPr>
+        <p:txBody>
+          <a:bodyPr/>
+          <a:p/>
+        </p:txBody>
       </p:sp>
       <p:sp>
         <p:nvSpPr>
@@ -9336,6 +9530,10 @@
             <a:prstDash val="solid"/>
           </a:ln>
         </p:spPr>
+        <p:txBody>
+          <a:bodyPr/>
+          <a:p/>
+        </p:txBody>
       </p:sp>
       <p:sp>
         <p:nvSpPr>
@@ -9437,6 +9635,10 @@
             <a:prstDash val="solid"/>
           </a:ln>
         </p:spPr>
+        <p:txBody>
+          <a:bodyPr/>
+          <a:p/>
+        </p:txBody>
       </p:sp>
       <p:sp>
         <p:nvSpPr>
@@ -9850,6 +10052,10 @@
             <a:prstDash val="solid"/>
           </a:ln>
         </p:spPr>
+        <p:txBody>
+          <a:bodyPr/>
+          <a:p/>
+        </p:txBody>
       </p:sp>
       <p:sp>
         <p:nvSpPr>
@@ -10297,6 +10503,10 @@
             <a:prstDash val="solid"/>
           </a:ln>
         </p:spPr>
+        <p:txBody>
+          <a:bodyPr/>
+          <a:p/>
+        </p:txBody>
       </p:sp>
       <p:sp>
         <p:nvSpPr>
@@ -10398,6 +10608,10 @@
             <a:prstDash val="solid"/>
           </a:ln>
         </p:spPr>
+        <p:txBody>
+          <a:bodyPr/>
+          <a:p/>
+        </p:txBody>
       </p:sp>
       <p:sp>
         <p:nvSpPr>
@@ -10733,6 +10947,10 @@
             <a:prstDash val="solid"/>
           </a:ln>
         </p:spPr>
+        <p:txBody>
+          <a:bodyPr/>
+          <a:p/>
+        </p:txBody>
       </p:sp>
       <p:sp>
         <p:nvSpPr>
@@ -10795,6 +11013,10 @@
             <a:prstDash val="solid"/>
           </a:ln>
         </p:spPr>
+        <p:txBody>
+          <a:bodyPr/>
+          <a:p/>
+        </p:txBody>
       </p:sp>
       <p:sp>
         <p:nvSpPr>
@@ -10820,6 +11042,10 @@
             <a:prstDash val="solid"/>
           </a:ln>
         </p:spPr>
+        <p:txBody>
+          <a:bodyPr/>
+          <a:p/>
+        </p:txBody>
       </p:sp>
       <p:sp>
         <p:nvSpPr>
@@ -10923,6 +11149,10 @@
             <a:prstDash val="solid"/>
           </a:ln>
         </p:spPr>
+        <p:txBody>
+          <a:bodyPr/>
+          <a:p/>
+        </p:txBody>
       </p:sp>
       <p:sp>
         <p:nvSpPr>
@@ -11026,6 +11256,10 @@
             <a:prstDash val="solid"/>
           </a:ln>
         </p:spPr>
+        <p:txBody>
+          <a:bodyPr/>
+          <a:p/>
+        </p:txBody>
       </p:sp>
       <p:sp>
         <p:nvSpPr>
@@ -11129,6 +11363,10 @@
             <a:prstDash val="solid"/>
           </a:ln>
         </p:spPr>
+        <p:txBody>
+          <a:bodyPr/>
+          <a:p/>
+        </p:txBody>
       </p:sp>
       <p:sp>
         <p:nvSpPr>
@@ -11230,6 +11468,10 @@
             <a:prstDash val="solid"/>
           </a:ln>
         </p:spPr>
+        <p:txBody>
+          <a:bodyPr/>
+          <a:p/>
+        </p:txBody>
       </p:sp>
       <p:sp>
         <p:nvSpPr>
@@ -11292,6 +11534,10 @@
             <a:prstDash val="solid"/>
           </a:ln>
         </p:spPr>
+        <p:txBody>
+          <a:bodyPr/>
+          <a:p/>
+        </p:txBody>
       </p:sp>
       <p:sp>
         <p:nvSpPr>
@@ -11512,6 +11758,10 @@
             <a:prstDash val="solid"/>
           </a:ln>
         </p:spPr>
+        <p:txBody>
+          <a:bodyPr/>
+          <a:p/>
+        </p:txBody>
       </p:sp>
       <p:sp>
         <p:nvSpPr>
@@ -11576,6 +11826,10 @@
             <a:prstDash val="solid"/>
           </a:ln>
         </p:spPr>
+        <p:txBody>
+          <a:bodyPr/>
+          <a:p/>
+        </p:txBody>
       </p:sp>
       <p:sp>
         <p:nvSpPr>
@@ -11718,6 +11972,10 @@
             <a:prstDash val="solid"/>
           </a:ln>
         </p:spPr>
+        <p:txBody>
+          <a:bodyPr/>
+          <a:p/>
+        </p:txBody>
       </p:sp>
       <p:sp>
         <p:nvSpPr>
@@ -11782,6 +12040,10 @@
             <a:prstDash val="solid"/>
           </a:ln>
         </p:spPr>
+        <p:txBody>
+          <a:bodyPr/>
+          <a:p/>
+        </p:txBody>
       </p:sp>
       <p:sp>
         <p:nvSpPr>
@@ -11995,6 +12257,10 @@
             <a:prstDash val="solid"/>
           </a:ln>
         </p:spPr>
+        <p:txBody>
+          <a:bodyPr/>
+          <a:p/>
+        </p:txBody>
       </p:sp>
       <p:sp>
         <p:nvSpPr>
@@ -12096,6 +12362,10 @@
             <a:prstDash val="solid"/>
           </a:ln>
         </p:spPr>
+        <p:txBody>
+          <a:bodyPr/>
+          <a:p/>
+        </p:txBody>
       </p:sp>
       <p:sp>
         <p:nvSpPr>
@@ -12353,6 +12623,10 @@
             <a:prstDash val="solid"/>
           </a:ln>
         </p:spPr>
+        <p:txBody>
+          <a:bodyPr/>
+          <a:p/>
+        </p:txBody>
       </p:sp>
       <p:sp>
         <p:nvSpPr>
@@ -12688,6 +12962,10 @@
             <a:prstDash val="solid"/>
           </a:ln>
         </p:spPr>
+        <p:txBody>
+          <a:bodyPr/>
+          <a:p/>
+        </p:txBody>
       </p:sp>
       <p:sp>
         <p:nvSpPr>
@@ -12713,6 +12991,10 @@
             <a:prstDash val="solid"/>
           </a:ln>
         </p:spPr>
+        <p:txBody>
+          <a:bodyPr/>
+          <a:p/>
+        </p:txBody>
       </p:sp>
       <p:sp>
         <p:nvSpPr>
@@ -13362,6 +13644,10 @@
             <a:prstDash val="solid"/>
           </a:ln>
         </p:spPr>
+        <p:txBody>
+          <a:bodyPr/>
+          <a:p/>
+        </p:txBody>
       </p:sp>
       <p:sp>
         <p:nvSpPr>
@@ -14945,6 +15231,10 @@
             <a:prstDash val="solid"/>
           </a:ln>
         </p:spPr>
+        <p:txBody>
+          <a:bodyPr/>
+          <a:p/>
+        </p:txBody>
       </p:sp>
       <p:sp>
         <p:nvSpPr>
@@ -15080,6 +15370,10 @@
             <a:prstDash val="solid"/>
           </a:ln>
         </p:spPr>
+        <p:txBody>
+          <a:bodyPr/>
+          <a:p/>
+        </p:txBody>
       </p:sp>
       <p:sp>
         <p:nvSpPr>
@@ -15181,6 +15475,10 @@
             <a:prstDash val="solid"/>
           </a:ln>
         </p:spPr>
+        <p:txBody>
+          <a:bodyPr/>
+          <a:p/>
+        </p:txBody>
       </p:sp>
       <p:sp>
         <p:nvSpPr>
@@ -15438,6 +15736,10 @@
             <a:prstDash val="solid"/>
           </a:ln>
         </p:spPr>
+        <p:txBody>
+          <a:bodyPr/>
+          <a:p/>
+        </p:txBody>
       </p:sp>
       <p:sp>
         <p:nvSpPr>
@@ -15500,6 +15802,10 @@
             <a:prstDash val="solid"/>
           </a:ln>
         </p:spPr>
+        <p:txBody>
+          <a:bodyPr/>
+          <a:p/>
+        </p:txBody>
       </p:sp>
       <p:sp>
         <p:nvSpPr>
@@ -15564,6 +15870,10 @@
             <a:prstDash val="solid"/>
           </a:ln>
         </p:spPr>
+        <p:txBody>
+          <a:bodyPr/>
+          <a:p/>
+        </p:txBody>
       </p:sp>
       <p:sp>
         <p:nvSpPr>
@@ -15589,6 +15899,10 @@
             <a:prstDash val="solid"/>
           </a:ln>
         </p:spPr>
+        <p:txBody>
+          <a:bodyPr/>
+          <a:p/>
+        </p:txBody>
       </p:sp>
       <p:sp>
         <p:nvSpPr>
@@ -15692,6 +16006,10 @@
             <a:prstDash val="solid"/>
           </a:ln>
         </p:spPr>
+        <p:txBody>
+          <a:bodyPr/>
+          <a:p/>
+        </p:txBody>
       </p:sp>
       <p:sp>
         <p:nvSpPr>
@@ -15717,6 +16035,10 @@
             <a:prstDash val="solid"/>
           </a:ln>
         </p:spPr>
+        <p:txBody>
+          <a:bodyPr/>
+          <a:p/>
+        </p:txBody>
       </p:sp>
       <p:sp>
         <p:nvSpPr>
@@ -15820,6 +16142,10 @@
             <a:prstDash val="solid"/>
           </a:ln>
         </p:spPr>
+        <p:txBody>
+          <a:bodyPr/>
+          <a:p/>
+        </p:txBody>
       </p:sp>
       <p:sp>
         <p:nvSpPr>
@@ -15845,6 +16171,10 @@
             <a:prstDash val="solid"/>
           </a:ln>
         </p:spPr>
+        <p:txBody>
+          <a:bodyPr/>
+          <a:p/>
+        </p:txBody>
       </p:sp>
       <p:sp>
         <p:nvSpPr>
@@ -15948,6 +16278,10 @@
             <a:prstDash val="solid"/>
           </a:ln>
         </p:spPr>
+        <p:txBody>
+          <a:bodyPr/>
+          <a:p/>
+        </p:txBody>
       </p:sp>
       <p:sp>
         <p:nvSpPr>
@@ -15973,6 +16307,10 @@
             <a:prstDash val="solid"/>
           </a:ln>
         </p:spPr>
+        <p:txBody>
+          <a:bodyPr/>
+          <a:p/>
+        </p:txBody>
       </p:sp>
       <p:sp>
         <p:nvSpPr>
@@ -16076,6 +16414,10 @@
             <a:prstDash val="solid"/>
           </a:ln>
         </p:spPr>
+        <p:txBody>
+          <a:bodyPr/>
+          <a:p/>
+        </p:txBody>
       </p:sp>
       <p:sp>
         <p:nvSpPr>
@@ -16101,6 +16443,10 @@
             <a:prstDash val="solid"/>
           </a:ln>
         </p:spPr>
+        <p:txBody>
+          <a:bodyPr/>
+          <a:p/>
+        </p:txBody>
       </p:sp>
       <p:sp>
         <p:nvSpPr>
@@ -16204,6 +16550,10 @@
             <a:prstDash val="solid"/>
           </a:ln>
         </p:spPr>
+        <p:txBody>
+          <a:bodyPr/>
+          <a:p/>
+        </p:txBody>
       </p:sp>
       <p:sp>
         <p:nvSpPr>
@@ -16229,6 +16579,10 @@
             <a:prstDash val="solid"/>
           </a:ln>
         </p:spPr>
+        <p:txBody>
+          <a:bodyPr/>
+          <a:p/>
+        </p:txBody>
       </p:sp>
       <p:sp>
         <p:nvSpPr>
@@ -16332,6 +16686,10 @@
             <a:prstDash val="solid"/>
           </a:ln>
         </p:spPr>
+        <p:txBody>
+          <a:bodyPr/>
+          <a:p/>
+        </p:txBody>
       </p:sp>
       <p:sp>
         <p:nvSpPr>
@@ -16357,6 +16715,10 @@
             <a:prstDash val="solid"/>
           </a:ln>
         </p:spPr>
+        <p:txBody>
+          <a:bodyPr/>
+          <a:p/>
+        </p:txBody>
       </p:sp>
       <p:sp>
         <p:nvSpPr>
@@ -16460,6 +16822,10 @@
             <a:prstDash val="solid"/>
           </a:ln>
         </p:spPr>
+        <p:txBody>
+          <a:bodyPr/>
+          <a:p/>
+        </p:txBody>
       </p:sp>
       <p:sp>
         <p:nvSpPr>
@@ -16485,6 +16851,10 @@
             <a:prstDash val="solid"/>
           </a:ln>
         </p:spPr>
+        <p:txBody>
+          <a:bodyPr/>
+          <a:p/>
+        </p:txBody>
       </p:sp>
       <p:sp>
         <p:nvSpPr>
@@ -16547,6 +16917,10 @@
             <a:prstDash val="solid"/>
           </a:ln>
         </p:spPr>
+        <p:txBody>
+          <a:bodyPr/>
+          <a:p/>
+        </p:txBody>
       </p:sp>
       <p:sp>
         <p:nvSpPr>
@@ -16609,6 +16983,10 @@
             <a:prstDash val="solid"/>
           </a:ln>
         </p:spPr>
+        <p:txBody>
+          <a:bodyPr/>
+          <a:p/>
+        </p:txBody>
       </p:sp>
       <p:sp>
         <p:nvSpPr>
@@ -16634,6 +17012,10 @@
             <a:prstDash val="solid"/>
           </a:ln>
         </p:spPr>
+        <p:txBody>
+          <a:bodyPr/>
+          <a:p/>
+        </p:txBody>
       </p:sp>
       <p:sp>
         <p:nvSpPr>
@@ -16737,6 +17119,10 @@
             <a:prstDash val="solid"/>
           </a:ln>
         </p:spPr>
+        <p:txBody>
+          <a:bodyPr/>
+          <a:p/>
+        </p:txBody>
       </p:sp>
       <p:sp>
         <p:nvSpPr>
@@ -16840,6 +17226,10 @@
             <a:prstDash val="solid"/>
           </a:ln>
         </p:spPr>
+        <p:txBody>
+          <a:bodyPr/>
+          <a:p/>
+        </p:txBody>
       </p:sp>
       <p:sp>
         <p:nvSpPr>
@@ -16943,6 +17333,10 @@
             <a:prstDash val="solid"/>
           </a:ln>
         </p:spPr>
+        <p:txBody>
+          <a:bodyPr/>
+          <a:p/>
+        </p:txBody>
       </p:sp>
       <p:sp>
         <p:nvSpPr>
@@ -17117,6 +17511,10 @@
             <a:prstDash val="solid"/>
           </a:ln>
         </p:spPr>
+        <p:txBody>
+          <a:bodyPr/>
+          <a:p/>
+        </p:txBody>
       </p:sp>
       <p:sp>
         <p:nvSpPr>
@@ -17218,6 +17616,10 @@
             <a:prstDash val="solid"/>
           </a:ln>
         </p:spPr>
+        <p:txBody>
+          <a:bodyPr/>
+          <a:p/>
+        </p:txBody>
       </p:sp>
       <p:sp>
         <p:nvSpPr>
@@ -17475,6 +17877,10 @@
             <a:prstDash val="solid"/>
           </a:ln>
         </p:spPr>
+        <p:txBody>
+          <a:bodyPr/>
+          <a:p/>
+        </p:txBody>
       </p:sp>
       <p:sp>
         <p:nvSpPr>
@@ -17537,6 +17943,10 @@
             <a:prstDash val="solid"/>
           </a:ln>
         </p:spPr>
+        <p:txBody>
+          <a:bodyPr/>
+          <a:p/>
+        </p:txBody>
       </p:sp>
       <p:sp>
         <p:nvSpPr>
@@ -18108,6 +18518,10 @@
             <a:prstDash val="solid"/>
           </a:ln>
         </p:spPr>
+        <p:txBody>
+          <a:bodyPr/>
+          <a:p/>
+        </p:txBody>
       </p:sp>
       <p:sp>
         <p:nvSpPr>
@@ -18172,6 +18586,10 @@
             <a:prstDash val="solid"/>
           </a:ln>
         </p:spPr>
+        <p:txBody>
+          <a:bodyPr/>
+          <a:p/>
+        </p:txBody>
       </p:sp>
       <p:sp>
         <p:nvSpPr>
@@ -18236,6 +18654,10 @@
             <a:prstDash val="solid"/>
           </a:ln>
         </p:spPr>
+        <p:txBody>
+          <a:bodyPr/>
+          <a:p/>
+        </p:txBody>
       </p:sp>
       <p:sp>
         <p:nvSpPr>
@@ -18300,6 +18722,10 @@
             <a:prstDash val="solid"/>
           </a:ln>
         </p:spPr>
+        <p:txBody>
+          <a:bodyPr/>
+          <a:p/>
+        </p:txBody>
       </p:sp>
       <p:sp>
         <p:nvSpPr>
@@ -18364,6 +18790,10 @@
             <a:prstDash val="solid"/>
           </a:ln>
         </p:spPr>
+        <p:txBody>
+          <a:bodyPr/>
+          <a:p/>
+        </p:txBody>
       </p:sp>
       <p:sp>
         <p:nvSpPr>
@@ -18428,6 +18858,10 @@
             <a:prstDash val="solid"/>
           </a:ln>
         </p:spPr>
+        <p:txBody>
+          <a:bodyPr/>
+          <a:p/>
+        </p:txBody>
       </p:sp>
       <p:sp>
         <p:nvSpPr>
@@ -18492,6 +18926,10 @@
             <a:prstDash val="solid"/>
           </a:ln>
         </p:spPr>
+        <p:txBody>
+          <a:bodyPr/>
+          <a:p/>
+        </p:txBody>
       </p:sp>
       <p:sp>
         <p:nvSpPr>
@@ -18556,6 +18994,10 @@
             <a:prstDash val="solid"/>
           </a:ln>
         </p:spPr>
+        <p:txBody>
+          <a:bodyPr/>
+          <a:p/>
+        </p:txBody>
       </p:sp>
       <p:sp>
         <p:nvSpPr>
@@ -18620,6 +19062,10 @@
             <a:prstDash val="solid"/>
           </a:ln>
         </p:spPr>
+        <p:txBody>
+          <a:bodyPr/>
+          <a:p/>
+        </p:txBody>
       </p:sp>
       <p:sp>
         <p:nvSpPr>
@@ -18684,6 +19130,10 @@
             <a:prstDash val="solid"/>
           </a:ln>
         </p:spPr>
+        <p:txBody>
+          <a:bodyPr/>
+          <a:p/>
+        </p:txBody>
       </p:sp>
       <p:sp>
         <p:nvSpPr>
@@ -18748,6 +19198,10 @@
             <a:prstDash val="solid"/>
           </a:ln>
         </p:spPr>
+        <p:txBody>
+          <a:bodyPr/>
+          <a:p/>
+        </p:txBody>
       </p:sp>
       <p:sp>
         <p:nvSpPr>
@@ -18812,6 +19266,10 @@
             <a:prstDash val="solid"/>
           </a:ln>
         </p:spPr>
+        <p:txBody>
+          <a:bodyPr/>
+          <a:p/>
+        </p:txBody>
       </p:sp>
       <p:sp>
         <p:nvSpPr>
@@ -18876,6 +19334,10 @@
             <a:prstDash val="solid"/>
           </a:ln>
         </p:spPr>
+        <p:txBody>
+          <a:bodyPr/>
+          <a:p/>
+        </p:txBody>
       </p:sp>
       <p:sp>
         <p:nvSpPr>
@@ -18940,6 +19402,10 @@
             <a:prstDash val="solid"/>
           </a:ln>
         </p:spPr>
+        <p:txBody>
+          <a:bodyPr/>
+          <a:p/>
+        </p:txBody>
       </p:sp>
       <p:sp>
         <p:nvSpPr>
@@ -19004,6 +19470,10 @@
             <a:prstDash val="solid"/>
           </a:ln>
         </p:spPr>
+        <p:txBody>
+          <a:bodyPr/>
+          <a:p/>
+        </p:txBody>
       </p:sp>
       <p:sp>
         <p:nvSpPr>
@@ -19068,6 +19538,10 @@
             <a:prstDash val="solid"/>
           </a:ln>
         </p:spPr>
+        <p:txBody>
+          <a:bodyPr/>
+          <a:p/>
+        </p:txBody>
       </p:sp>
       <p:sp>
         <p:nvSpPr>
@@ -19132,6 +19606,10 @@
             <a:prstDash val="solid"/>
           </a:ln>
         </p:spPr>
+        <p:txBody>
+          <a:bodyPr/>
+          <a:p/>
+        </p:txBody>
       </p:sp>
       <p:sp>
         <p:nvSpPr>
@@ -19196,6 +19674,10 @@
             <a:prstDash val="solid"/>
           </a:ln>
         </p:spPr>
+        <p:txBody>
+          <a:bodyPr/>
+          <a:p/>
+        </p:txBody>
       </p:sp>
       <p:sp>
         <p:nvSpPr>
@@ -19260,6 +19742,10 @@
             <a:prstDash val="solid"/>
           </a:ln>
         </p:spPr>
+        <p:txBody>
+          <a:bodyPr/>
+          <a:p/>
+        </p:txBody>
       </p:sp>
       <p:sp>
         <p:nvSpPr>
@@ -19324,6 +19810,10 @@
             <a:prstDash val="solid"/>
           </a:ln>
         </p:spPr>
+        <p:txBody>
+          <a:bodyPr/>
+          <a:p/>
+        </p:txBody>
       </p:sp>
       <p:sp>
         <p:nvSpPr>
@@ -19388,6 +19878,10 @@
             <a:prstDash val="solid"/>
           </a:ln>
         </p:spPr>
+        <p:txBody>
+          <a:bodyPr/>
+          <a:p/>
+        </p:txBody>
       </p:sp>
       <p:sp>
         <p:nvSpPr>
@@ -19452,6 +19946,10 @@
             <a:prstDash val="solid"/>
           </a:ln>
         </p:spPr>
+        <p:txBody>
+          <a:bodyPr/>
+          <a:p/>
+        </p:txBody>
       </p:sp>
       <p:sp>
         <p:nvSpPr>
@@ -19516,6 +20014,10 @@
             <a:prstDash val="solid"/>
           </a:ln>
         </p:spPr>
+        <p:txBody>
+          <a:bodyPr/>
+          <a:p/>
+        </p:txBody>
       </p:sp>
       <p:sp>
         <p:nvSpPr>
@@ -19580,6 +20082,10 @@
             <a:prstDash val="solid"/>
           </a:ln>
         </p:spPr>
+        <p:txBody>
+          <a:bodyPr/>
+          <a:p/>
+        </p:txBody>
       </p:sp>
       <p:sp>
         <p:nvSpPr>
@@ -19644,6 +20150,10 @@
             <a:prstDash val="solid"/>
           </a:ln>
         </p:spPr>
+        <p:txBody>
+          <a:bodyPr/>
+          <a:p/>
+        </p:txBody>
       </p:sp>
       <p:sp>
         <p:nvSpPr>
@@ -19708,6 +20218,10 @@
             <a:prstDash val="solid"/>
           </a:ln>
         </p:spPr>
+        <p:txBody>
+          <a:bodyPr/>
+          <a:p/>
+        </p:txBody>
       </p:sp>
       <p:sp>
         <p:nvSpPr>
@@ -19772,6 +20286,10 @@
             <a:prstDash val="solid"/>
           </a:ln>
         </p:spPr>
+        <p:txBody>
+          <a:bodyPr/>
+          <a:p/>
+        </p:txBody>
       </p:sp>
       <p:sp>
         <p:nvSpPr>
@@ -19836,6 +20354,10 @@
             <a:prstDash val="solid"/>
           </a:ln>
         </p:spPr>
+        <p:txBody>
+          <a:bodyPr/>
+          <a:p/>
+        </p:txBody>
       </p:sp>
       <p:sp>
         <p:nvSpPr>
@@ -19900,6 +20422,10 @@
             <a:prstDash val="solid"/>
           </a:ln>
         </p:spPr>
+        <p:txBody>
+          <a:bodyPr/>
+          <a:p/>
+        </p:txBody>
       </p:sp>
       <p:sp>
         <p:nvSpPr>
@@ -19964,6 +20490,10 @@
             <a:prstDash val="solid"/>
           </a:ln>
         </p:spPr>
+        <p:txBody>
+          <a:bodyPr/>
+          <a:p/>
+        </p:txBody>
       </p:sp>
       <p:sp>
         <p:nvSpPr>
@@ -20028,6 +20558,10 @@
             <a:prstDash val="solid"/>
           </a:ln>
         </p:spPr>
+        <p:txBody>
+          <a:bodyPr/>
+          <a:p/>
+        </p:txBody>
       </p:sp>
       <p:sp>
         <p:nvSpPr>
@@ -20092,6 +20626,10 @@
             <a:prstDash val="solid"/>
           </a:ln>
         </p:spPr>
+        <p:txBody>
+          <a:bodyPr/>
+          <a:p/>
+        </p:txBody>
       </p:sp>
       <p:sp>
         <p:nvSpPr>
@@ -20156,6 +20694,10 @@
             <a:prstDash val="solid"/>
           </a:ln>
         </p:spPr>
+        <p:txBody>
+          <a:bodyPr/>
+          <a:p/>
+        </p:txBody>
       </p:sp>
       <p:sp>
         <p:nvSpPr>
@@ -20220,6 +20762,10 @@
             <a:prstDash val="solid"/>
           </a:ln>
         </p:spPr>
+        <p:txBody>
+          <a:bodyPr/>
+          <a:p/>
+        </p:txBody>
       </p:sp>
       <p:sp>
         <p:nvSpPr>
@@ -20284,6 +20830,10 @@
             <a:prstDash val="solid"/>
           </a:ln>
         </p:spPr>
+        <p:txBody>
+          <a:bodyPr/>
+          <a:p/>
+        </p:txBody>
       </p:sp>
       <p:sp>
         <p:nvSpPr>
@@ -20348,6 +20898,10 @@
             <a:prstDash val="solid"/>
           </a:ln>
         </p:spPr>
+        <p:txBody>
+          <a:bodyPr/>
+          <a:p/>
+        </p:txBody>
       </p:sp>
       <p:sp>
         <p:nvSpPr>
@@ -20412,6 +20966,10 @@
             <a:prstDash val="solid"/>
           </a:ln>
         </p:spPr>
+        <p:txBody>
+          <a:bodyPr/>
+          <a:p/>
+        </p:txBody>
       </p:sp>
       <p:sp>
         <p:nvSpPr>
@@ -20476,6 +21034,10 @@
             <a:prstDash val="solid"/>
           </a:ln>
         </p:spPr>
+        <p:txBody>
+          <a:bodyPr/>
+          <a:p/>
+        </p:txBody>
       </p:sp>
       <p:sp>
         <p:nvSpPr>
@@ -20540,6 +21102,10 @@
             <a:prstDash val="solid"/>
           </a:ln>
         </p:spPr>
+        <p:txBody>
+          <a:bodyPr/>
+          <a:p/>
+        </p:txBody>
       </p:sp>
       <p:sp>
         <p:nvSpPr>
@@ -20604,6 +21170,10 @@
             <a:prstDash val="solid"/>
           </a:ln>
         </p:spPr>
+        <p:txBody>
+          <a:bodyPr/>
+          <a:p/>
+        </p:txBody>
       </p:sp>
       <p:sp>
         <p:nvSpPr>
@@ -20668,6 +21238,10 @@
             <a:prstDash val="solid"/>
           </a:ln>
         </p:spPr>
+        <p:txBody>
+          <a:bodyPr/>
+          <a:p/>
+        </p:txBody>
       </p:sp>
       <p:sp>
         <p:nvSpPr>
@@ -20732,6 +21306,10 @@
             <a:prstDash val="solid"/>
           </a:ln>
         </p:spPr>
+        <p:txBody>
+          <a:bodyPr/>
+          <a:p/>
+        </p:txBody>
       </p:sp>
       <p:sp>
         <p:nvSpPr>
@@ -20796,6 +21374,10 @@
             <a:prstDash val="solid"/>
           </a:ln>
         </p:spPr>
+        <p:txBody>
+          <a:bodyPr/>
+          <a:p/>
+        </p:txBody>
       </p:sp>
       <p:sp>
         <p:nvSpPr>
@@ -20860,6 +21442,10 @@
             <a:prstDash val="solid"/>
           </a:ln>
         </p:spPr>
+        <p:txBody>
+          <a:bodyPr/>
+          <a:p/>
+        </p:txBody>
       </p:sp>
       <p:sp>
         <p:nvSpPr>
@@ -20924,6 +21510,10 @@
             <a:prstDash val="solid"/>
           </a:ln>
         </p:spPr>
+        <p:txBody>
+          <a:bodyPr/>
+          <a:p/>
+        </p:txBody>
       </p:sp>
       <p:sp>
         <p:nvSpPr>
@@ -20988,6 +21578,10 @@
             <a:prstDash val="solid"/>
           </a:ln>
         </p:spPr>
+        <p:txBody>
+          <a:bodyPr/>
+          <a:p/>
+        </p:txBody>
       </p:sp>
       <p:sp>
         <p:nvSpPr>
@@ -21052,6 +21646,10 @@
             <a:prstDash val="solid"/>
           </a:ln>
         </p:spPr>
+        <p:txBody>
+          <a:bodyPr/>
+          <a:p/>
+        </p:txBody>
       </p:sp>
       <p:sp>
         <p:nvSpPr>
@@ -21116,6 +21714,10 @@
             <a:prstDash val="solid"/>
           </a:ln>
         </p:spPr>
+        <p:txBody>
+          <a:bodyPr/>
+          <a:p/>
+        </p:txBody>
       </p:sp>
       <p:sp>
         <p:nvSpPr>
@@ -21180,6 +21782,10 @@
             <a:prstDash val="solid"/>
           </a:ln>
         </p:spPr>
+        <p:txBody>
+          <a:bodyPr/>
+          <a:p/>
+        </p:txBody>
       </p:sp>
       <p:sp>
         <p:nvSpPr>
@@ -21242,6 +21848,10 @@
             <a:prstDash val="solid"/>
           </a:ln>
         </p:spPr>
+        <p:txBody>
+          <a:bodyPr/>
+          <a:p/>
+        </p:txBody>
       </p:sp>
       <p:sp>
         <p:nvSpPr>
@@ -21304,6 +21914,10 @@
             <a:prstDash val="solid"/>
           </a:ln>
         </p:spPr>
+        <p:txBody>
+          <a:bodyPr/>
+          <a:p/>
+        </p:txBody>
       </p:sp>
       <p:sp>
         <p:nvSpPr>
@@ -21327,6 +21941,10 @@
             <a:prstDash val="solid"/>
           </a:ln>
         </p:spPr>
+        <p:txBody>
+          <a:bodyPr/>
+          <a:p/>
+        </p:txBody>
       </p:sp>
       <p:sp>
         <p:nvSpPr>
@@ -21467,6 +22085,10 @@
             <a:prstDash val="solid"/>
           </a:ln>
         </p:spPr>
+        <p:txBody>
+          <a:bodyPr/>
+          <a:p/>
+        </p:txBody>
       </p:sp>
       <p:sp>
         <p:nvSpPr>
@@ -21607,6 +22229,10 @@
             <a:prstDash val="solid"/>
           </a:ln>
         </p:spPr>
+        <p:txBody>
+          <a:bodyPr/>
+          <a:p/>
+        </p:txBody>
       </p:sp>
       <p:sp>
         <p:nvSpPr>
@@ -21859,6 +22485,10 @@
             <a:prstDash val="solid"/>
           </a:ln>
         </p:spPr>
+        <p:txBody>
+          <a:bodyPr/>
+          <a:p/>
+        </p:txBody>
       </p:sp>
       <p:sp>
         <p:nvSpPr>
@@ -21960,6 +22590,10 @@
             <a:prstDash val="solid"/>
           </a:ln>
         </p:spPr>
+        <p:txBody>
+          <a:bodyPr/>
+          <a:p/>
+        </p:txBody>
       </p:sp>
       <p:sp>
         <p:nvSpPr>
@@ -22217,6 +22851,10 @@
             <a:prstDash val="solid"/>
           </a:ln>
         </p:spPr>
+        <p:txBody>
+          <a:bodyPr/>
+          <a:p/>
+        </p:txBody>
       </p:sp>
       <p:sp>
         <p:nvSpPr>
@@ -22279,6 +22917,10 @@
             <a:prstDash val="solid"/>
           </a:ln>
         </p:spPr>
+        <p:txBody>
+          <a:bodyPr/>
+          <a:p/>
+        </p:txBody>
       </p:sp>
       <p:sp>
         <p:nvSpPr>
@@ -22302,6 +22944,10 @@
             <a:prstDash val="solid"/>
           </a:ln>
         </p:spPr>
+        <p:txBody>
+          <a:bodyPr/>
+          <a:p/>
+        </p:txBody>
       </p:sp>
       <p:sp>
         <p:nvSpPr>
@@ -22366,6 +23012,10 @@
             <a:prstDash val="solid"/>
           </a:ln>
         </p:spPr>
+        <p:txBody>
+          <a:bodyPr/>
+          <a:p/>
+        </p:txBody>
       </p:sp>
       <p:sp>
         <p:nvSpPr>
@@ -22547,6 +23197,10 @@
             <a:prstDash val="solid"/>
           </a:ln>
         </p:spPr>
+        <p:txBody>
+          <a:bodyPr/>
+          <a:p/>
+        </p:txBody>
       </p:sp>
       <p:sp>
         <p:nvSpPr>
@@ -22728,6 +23382,10 @@
             <a:prstDash val="solid"/>
           </a:ln>
         </p:spPr>
+        <p:txBody>
+          <a:bodyPr/>
+          <a:p/>
+        </p:txBody>
       </p:sp>
       <p:sp>
         <p:nvSpPr>
@@ -22909,6 +23567,10 @@
             <a:prstDash val="solid"/>
           </a:ln>
         </p:spPr>
+        <p:txBody>
+          <a:bodyPr/>
+          <a:p/>
+        </p:txBody>
       </p:sp>
       <p:sp>
         <p:nvSpPr>
@@ -23090,6 +23752,10 @@
             <a:prstDash val="solid"/>
           </a:ln>
         </p:spPr>
+        <p:txBody>
+          <a:bodyPr/>
+          <a:p/>
+        </p:txBody>
       </p:sp>
       <p:sp>
         <p:nvSpPr>
@@ -23271,6 +23937,10 @@
             <a:prstDash val="solid"/>
           </a:ln>
         </p:spPr>
+        <p:txBody>
+          <a:bodyPr/>
+          <a:p/>
+        </p:txBody>
       </p:sp>
       <p:sp>
         <p:nvSpPr>
@@ -23452,6 +24122,10 @@
             <a:prstDash val="solid"/>
           </a:ln>
         </p:spPr>
+        <p:txBody>
+          <a:bodyPr/>
+          <a:p/>
+        </p:txBody>
       </p:sp>
       <p:sp>
         <p:nvSpPr>
@@ -23633,6 +24307,10 @@
             <a:prstDash val="solid"/>
           </a:ln>
         </p:spPr>
+        <p:txBody>
+          <a:bodyPr/>
+          <a:p/>
+        </p:txBody>
       </p:sp>
       <p:sp>
         <p:nvSpPr>
@@ -23931,6 +24609,10 @@
             <a:prstDash val="solid"/>
           </a:ln>
         </p:spPr>
+        <p:txBody>
+          <a:bodyPr/>
+          <a:p/>
+        </p:txBody>
       </p:sp>
       <p:sp>
         <p:nvSpPr>
@@ -24112,6 +24794,10 @@
             <a:prstDash val="solid"/>
           </a:ln>
         </p:spPr>
+        <p:txBody>
+          <a:bodyPr/>
+          <a:p/>
+        </p:txBody>
       </p:sp>
       <p:sp>
         <p:nvSpPr>
@@ -24293,6 +24979,10 @@
             <a:prstDash val="solid"/>
           </a:ln>
         </p:spPr>
+        <p:txBody>
+          <a:bodyPr/>
+          <a:p/>
+        </p:txBody>
       </p:sp>
       <p:sp>
         <p:nvSpPr>
@@ -24474,6 +25164,10 @@
             <a:prstDash val="solid"/>
           </a:ln>
         </p:spPr>
+        <p:txBody>
+          <a:bodyPr/>
+          <a:p/>
+        </p:txBody>
       </p:sp>
       <p:sp>
         <p:nvSpPr>
@@ -24655,6 +25349,10 @@
             <a:prstDash val="solid"/>
           </a:ln>
         </p:spPr>
+        <p:txBody>
+          <a:bodyPr/>
+          <a:p/>
+        </p:txBody>
       </p:sp>
       <p:sp>
         <p:nvSpPr>
@@ -24795,6 +25493,10 @@
             <a:prstDash val="solid"/>
           </a:ln>
         </p:spPr>
+        <p:txBody>
+          <a:bodyPr/>
+          <a:p/>
+        </p:txBody>
       </p:sp>
       <p:sp>
         <p:nvSpPr>
@@ -24857,6 +25559,10 @@
             <a:prstDash val="solid"/>
           </a:ln>
         </p:spPr>
+        <p:txBody>
+          <a:bodyPr/>
+          <a:p/>
+        </p:txBody>
       </p:sp>
       <p:sp>
         <p:nvSpPr>
@@ -24997,6 +25703,10 @@
             <a:prstDash val="solid"/>
           </a:ln>
         </p:spPr>
+        <p:txBody>
+          <a:bodyPr/>
+          <a:p/>
+        </p:txBody>
       </p:sp>
       <p:sp>
         <p:nvSpPr>
@@ -25600,6 +26310,10 @@
             <a:prstDash val="solid"/>
           </a:ln>
         </p:spPr>
+        <p:txBody>
+          <a:bodyPr/>
+          <a:p/>
+        </p:txBody>
       </p:sp>
       <p:sp>
         <p:nvSpPr>
@@ -25701,6 +26415,10 @@
             <a:prstDash val="solid"/>
           </a:ln>
         </p:spPr>
+        <p:txBody>
+          <a:bodyPr/>
+          <a:p/>
+        </p:txBody>
       </p:sp>
       <p:sp>
         <p:nvSpPr>
@@ -25763,6 +26481,10 @@
             <a:prstDash val="solid"/>
           </a:ln>
         </p:spPr>
+        <p:txBody>
+          <a:bodyPr/>
+          <a:p/>
+        </p:txBody>
       </p:sp>
       <p:sp>
         <p:nvSpPr>
@@ -25903,6 +26625,10 @@
             <a:prstDash val="solid"/>
           </a:ln>
         </p:spPr>
+        <p:txBody>
+          <a:bodyPr/>
+          <a:p/>
+        </p:txBody>
       </p:sp>
       <p:sp>
         <p:nvSpPr>
@@ -26043,6 +26769,10 @@
             <a:prstDash val="solid"/>
           </a:ln>
         </p:spPr>
+        <p:txBody>
+          <a:bodyPr/>
+          <a:p/>
+        </p:txBody>
       </p:sp>
       <p:sp>
         <p:nvSpPr>
@@ -26183,6 +26913,10 @@
             <a:prstDash val="solid"/>
           </a:ln>
         </p:spPr>
+        <p:txBody>
+          <a:bodyPr/>
+          <a:p/>
+        </p:txBody>
       </p:sp>
       <p:sp>
         <p:nvSpPr>
@@ -26323,6 +27057,10 @@
             <a:prstDash val="solid"/>
           </a:ln>
         </p:spPr>
+        <p:txBody>
+          <a:bodyPr/>
+          <a:p/>
+        </p:txBody>
       </p:sp>
       <p:sp>
         <p:nvSpPr>
@@ -26385,6 +27123,10 @@
             <a:prstDash val="solid"/>
           </a:ln>
         </p:spPr>
+        <p:txBody>
+          <a:bodyPr/>
+          <a:p/>
+        </p:txBody>
       </p:sp>
       <p:sp>
         <p:nvSpPr>
@@ -26525,6 +27267,10 @@
             <a:prstDash val="solid"/>
           </a:ln>
         </p:spPr>
+        <p:txBody>
+          <a:bodyPr/>
+          <a:p/>
+        </p:txBody>
       </p:sp>
       <p:sp>
         <p:nvSpPr>
@@ -26665,6 +27411,10 @@
             <a:prstDash val="solid"/>
           </a:ln>
         </p:spPr>
+        <p:txBody>
+          <a:bodyPr/>
+          <a:p/>
+        </p:txBody>
       </p:sp>
       <p:sp>
         <p:nvSpPr>
@@ -26805,6 +27555,10 @@
             <a:prstDash val="solid"/>
           </a:ln>
         </p:spPr>
+        <p:txBody>
+          <a:bodyPr/>
+          <a:p/>
+        </p:txBody>
       </p:sp>
       <p:sp>
         <p:nvSpPr>
@@ -26945,6 +27699,10 @@
             <a:prstDash val="solid"/>
           </a:ln>
         </p:spPr>
+        <p:txBody>
+          <a:bodyPr/>
+          <a:p/>
+        </p:txBody>
       </p:sp>
       <p:sp>
         <p:nvSpPr>
@@ -27085,6 +27843,10 @@
             <a:prstDash val="solid"/>
           </a:ln>
         </p:spPr>
+        <p:txBody>
+          <a:bodyPr/>
+          <a:p/>
+        </p:txBody>
       </p:sp>
       <p:sp>
         <p:nvSpPr>
@@ -27459,6 +28221,10 @@
             <a:prstDash val="solid"/>
           </a:ln>
         </p:spPr>
+        <p:txBody>
+          <a:bodyPr/>
+          <a:p/>
+        </p:txBody>
       </p:sp>
       <p:sp>
         <p:nvSpPr>
@@ -27594,6 +28360,10 @@
             <a:prstDash val="solid"/>
           </a:ln>
         </p:spPr>
+        <p:txBody>
+          <a:bodyPr/>
+          <a:p/>
+        </p:txBody>
       </p:sp>
       <p:sp>
         <p:nvSpPr>
@@ -27695,6 +28465,10 @@
             <a:prstDash val="solid"/>
           </a:ln>
         </p:spPr>
+        <p:txBody>
+          <a:bodyPr/>
+          <a:p/>
+        </p:txBody>
       </p:sp>
       <p:sp>
         <p:nvSpPr>
@@ -27757,6 +28531,10 @@
             <a:prstDash val="solid"/>
           </a:ln>
         </p:spPr>
+        <p:txBody>
+          <a:bodyPr/>
+          <a:p/>
+        </p:txBody>
       </p:sp>
       <p:sp>
         <p:nvSpPr>
@@ -27938,6 +28716,10 @@
             <a:prstDash val="solid"/>
           </a:ln>
         </p:spPr>
+        <p:txBody>
+          <a:bodyPr/>
+          <a:p/>
+        </p:txBody>
       </p:sp>
       <p:sp>
         <p:nvSpPr>
@@ -28041,6 +28823,10 @@
             <a:prstDash val="solid"/>
           </a:ln>
         </p:spPr>
+        <p:txBody>
+          <a:bodyPr/>
+          <a:p/>
+        </p:txBody>
       </p:sp>
       <p:sp>
         <p:nvSpPr>
@@ -28144,6 +28930,10 @@
             <a:prstDash val="solid"/>
           </a:ln>
         </p:spPr>
+        <p:txBody>
+          <a:bodyPr/>
+          <a:p/>
+        </p:txBody>
       </p:sp>
       <p:sp>
         <p:nvSpPr>
@@ -28247,6 +29037,10 @@
             <a:prstDash val="solid"/>
           </a:ln>
         </p:spPr>
+        <p:txBody>
+          <a:bodyPr/>
+          <a:p/>
+        </p:txBody>
       </p:sp>
       <p:sp>
         <p:nvSpPr>
@@ -28387,6 +29181,10 @@
             <a:prstDash val="solid"/>
           </a:ln>
         </p:spPr>
+        <p:txBody>
+          <a:bodyPr/>
+          <a:p/>
+        </p:txBody>
       </p:sp>
       <p:sp>
         <p:nvSpPr>
@@ -28449,6 +29247,10 @@
             <a:prstDash val="solid"/>
           </a:ln>
         </p:spPr>
+        <p:txBody>
+          <a:bodyPr/>
+          <a:p/>
+        </p:txBody>
       </p:sp>
       <p:sp>
         <p:nvSpPr>
@@ -28630,6 +29432,10 @@
             <a:prstDash val="solid"/>
           </a:ln>
         </p:spPr>
+        <p:txBody>
+          <a:bodyPr/>
+          <a:p/>
+        </p:txBody>
       </p:sp>
       <p:sp>
         <p:nvSpPr>
@@ -28811,6 +29617,10 @@
             <a:prstDash val="solid"/>
           </a:ln>
         </p:spPr>
+        <p:txBody>
+          <a:bodyPr/>
+          <a:p/>
+        </p:txBody>
       </p:sp>
       <p:sp>
         <p:nvSpPr>
@@ -29224,6 +30034,10 @@
             <a:prstDash val="solid"/>
           </a:ln>
         </p:spPr>
+        <p:txBody>
+          <a:bodyPr/>
+          <a:p/>
+        </p:txBody>
       </p:sp>
       <p:sp>
         <p:nvSpPr>
@@ -29398,6 +30212,10 @@
             <a:prstDash val="solid"/>
           </a:ln>
         </p:spPr>
+        <p:txBody>
+          <a:bodyPr/>
+          <a:p/>
+        </p:txBody>
       </p:sp>
       <p:sp>
         <p:nvSpPr>
@@ -29499,6 +30317,10 @@
             <a:prstDash val="solid"/>
           </a:ln>
         </p:spPr>
+        <p:txBody>
+          <a:bodyPr/>
+          <a:p/>
+        </p:txBody>
       </p:sp>
       <p:sp>
         <p:nvSpPr>
@@ -29873,6 +30695,10 @@
             <a:prstDash val="solid"/>
           </a:ln>
         </p:spPr>
+        <p:txBody>
+          <a:bodyPr/>
+          <a:p/>
+        </p:txBody>
       </p:sp>
       <p:sp>
         <p:nvSpPr>
@@ -30522,6 +31348,10 @@
             <a:prstDash val="solid"/>
           </a:ln>
         </p:spPr>
+        <p:txBody>
+          <a:bodyPr/>
+          <a:p/>
+        </p:txBody>
       </p:sp>
       <p:sp>
         <p:nvSpPr>
@@ -30547,6 +31377,10 @@
             <a:prstDash val="solid"/>
           </a:ln>
         </p:spPr>
+        <p:txBody>
+          <a:bodyPr/>
+          <a:p/>
+        </p:txBody>
       </p:sp>
       <p:sp>
         <p:nvSpPr>
@@ -30882,6 +31716,10 @@
             <a:prstDash val="solid"/>
           </a:ln>
         </p:spPr>
+        <p:txBody>
+          <a:bodyPr/>
+          <a:p/>
+        </p:txBody>
       </p:sp>
       <p:sp>
         <p:nvSpPr>
@@ -30946,6 +31784,10 @@
             <a:prstDash val="solid"/>
           </a:ln>
         </p:spPr>
+        <p:txBody>
+          <a:bodyPr/>
+          <a:p/>
+        </p:txBody>
       </p:sp>
       <p:sp>
         <p:nvSpPr>
@@ -31049,6 +31891,10 @@
             <a:prstDash val="solid"/>
           </a:ln>
         </p:spPr>
+        <p:txBody>
+          <a:bodyPr/>
+          <a:p/>
+        </p:txBody>
       </p:sp>
       <p:sp>
         <p:nvSpPr>
@@ -31152,6 +31998,10 @@
             <a:prstDash val="solid"/>
           </a:ln>
         </p:spPr>
+        <p:txBody>
+          <a:bodyPr/>
+          <a:p/>
+        </p:txBody>
       </p:sp>
       <p:sp>
         <p:nvSpPr>
